--- a/guides/problems/navier-stokes/output/Navier_Stokes_Brief_v1.0.0_EN.pptx
+++ b/guides/problems/navier-stokes/output/Navier_Stokes_Brief_v1.0.0_EN.pptx
@@ -65,7 +65,7 @@
         <p:txBody>
           <a:bodyPr/>
           <a:p>
-            <a:fld id="{83A88482-D1C0-48E4-849C-93FDA4936D0C}" type="slidenum">
+            <a:fld id="{600CD007-8F45-471C-A55A-2A1A1B9B5BA5}" type="slidenum">
               <a:t>&lt;#&gt;</a:t>
             </a:fld>
           </a:p>
@@ -253,7 +253,7 @@
         <p:txBody>
           <a:bodyPr/>
           <a:p>
-            <a:fld id="{49FE4C7A-F59E-4E12-8D68-0A0AB0606B19}" type="slidenum">
+            <a:fld id="{34E5AC46-07F1-4121-ABC2-64AB66E78DA4}" type="slidenum">
               <a:t>&lt;#&gt;</a:t>
             </a:fld>
           </a:p>
@@ -509,7 +509,7 @@
         <p:txBody>
           <a:bodyPr/>
           <a:p>
-            <a:fld id="{E4E4041F-C160-402D-A771-4C3012C92DA2}" type="slidenum">
+            <a:fld id="{5AE16D42-8F7F-4FB9-A1E5-387E5759271A}" type="slidenum">
               <a:t>&lt;#&gt;</a:t>
             </a:fld>
           </a:p>
@@ -833,7 +833,7 @@
         <p:txBody>
           <a:bodyPr/>
           <a:p>
-            <a:fld id="{6C0A6944-ACF3-48DF-8A4C-B8455E11E92A}" type="slidenum">
+            <a:fld id="{7FE26105-F63E-43F0-922D-BAD2EB7D8CD3}" type="slidenum">
               <a:t>&lt;#&gt;</a:t>
             </a:fld>
           </a:p>
@@ -990,7 +990,7 @@
         <p:txBody>
           <a:bodyPr/>
           <a:p>
-            <a:fld id="{8C8C2D22-9299-4003-865E-8D3172585158}" type="slidenum">
+            <a:fld id="{DCCA862E-68BA-4CCB-BE7B-A53A4946E1E2}" type="slidenum">
               <a:t>&lt;#&gt;</a:t>
             </a:fld>
           </a:p>
@@ -1144,7 +1144,7 @@
         <p:txBody>
           <a:bodyPr/>
           <a:p>
-            <a:fld id="{0E0CE148-5095-4448-BEC8-ED9AF369A087}" type="slidenum">
+            <a:fld id="{5D8154EA-4CAD-45DC-9F3C-BBBA99D2008B}" type="slidenum">
               <a:t>&lt;#&gt;</a:t>
             </a:fld>
           </a:p>
@@ -1332,7 +1332,7 @@
         <p:txBody>
           <a:bodyPr/>
           <a:p>
-            <a:fld id="{EE37208B-1015-4F2B-A7D5-F3027ADD20AD}" type="slidenum">
+            <a:fld id="{9922681D-5749-4C3F-8D73-75E2AB05CBC3}" type="slidenum">
               <a:t>&lt;#&gt;</a:t>
             </a:fld>
           </a:p>
@@ -1452,7 +1452,7 @@
         <p:txBody>
           <a:bodyPr/>
           <a:p>
-            <a:fld id="{A35E7CE9-2DD6-4E4D-ABED-0E29E88D872D}" type="slidenum">
+            <a:fld id="{4CA706D5-B808-4A1F-8FF2-B28D5BE7EFE8}" type="slidenum">
               <a:t>&lt;#&gt;</a:t>
             </a:fld>
           </a:p>
@@ -1572,7 +1572,7 @@
         <p:txBody>
           <a:bodyPr/>
           <a:p>
-            <a:fld id="{94215370-0C6A-4123-B4FA-C0FAA75B9BAA}" type="slidenum">
+            <a:fld id="{971DB135-C06F-47C0-9D0A-F0D7ACBD4CFC}" type="slidenum">
               <a:t>&lt;#&gt;</a:t>
             </a:fld>
           </a:p>
@@ -1794,7 +1794,7 @@
         <p:txBody>
           <a:bodyPr/>
           <a:p>
-            <a:fld id="{5FF82670-80AB-4FDA-95C7-B69A0198A40C}" type="slidenum">
+            <a:fld id="{22F88025-7B06-43EC-901E-9C290C93C51F}" type="slidenum">
               <a:t>&lt;#&gt;</a:t>
             </a:fld>
           </a:p>
@@ -2016,7 +2016,7 @@
         <p:txBody>
           <a:bodyPr/>
           <a:p>
-            <a:fld id="{99FF6BEA-321E-4853-9050-19FBCB30BE78}" type="slidenum">
+            <a:fld id="{B7679D69-AF49-42DB-84A9-486245D7FA24}" type="slidenum">
               <a:t>&lt;#&gt;</a:t>
             </a:fld>
           </a:p>
@@ -2238,7 +2238,7 @@
         <p:txBody>
           <a:bodyPr/>
           <a:p>
-            <a:fld id="{FEF03D4A-0E60-408F-B325-04152CADD608}" type="slidenum">
+            <a:fld id="{46EB2482-A303-4149-9E59-25CA002FF548}" type="slidenum">
               <a:t>&lt;#&gt;</a:t>
             </a:fld>
           </a:p>
@@ -2650,7 +2650,7 @@
             <a:pPr algn="r">
               <a:buNone/>
             </a:pPr>
-            <a:fld id="{987D5A54-EA10-497D-A910-F52B8950EFCD}" type="slidenum">
+            <a:fld id="{692A47AB-399D-4C74-8B1F-4CBBB8E915D7}" type="slidenum">
               <a:rPr b="0" lang="en-US" sz="1400" spc="-1" strike="noStrike">
                 <a:latin typeface="Times New Roman"/>
               </a:rPr>
